--- a/stage3_neural_networks/02_dropout_regularisation/Lecture-11-Dropout-Regularisation.pptx
+++ b/stage3_neural_networks/02_dropout_regularisation/Lecture-11-Dropout-Regularisation.pptx
@@ -8307,6 +8307,9 @@
           <a:lstStyle/>
           <a:p>
             <a:r>
+              <a:rPr>
+                <a:latin typeface="Calibri"/>
+              </a:rPr>
               <a:t>AI Basic Training</a:t>
             </a:r>
           </a:p>
@@ -8328,6 +8331,9 @@
           <a:lstStyle/>
           <a:p>
             <a:r>
+              <a:rPr>
+                <a:latin typeface="Calibri"/>
+              </a:rPr>
               <a:t>Lesson 3.2  |  Stage 3: Neural Networks</a:t>
             </a:r>
           </a:p>
@@ -8349,6 +8355,9 @@
           <a:lstStyle/>
           <a:p>
             <a:r>
+              <a:rPr b="1">
+                <a:latin typeface="Calibri"/>
+              </a:rPr>
               <a:t>Dropout &amp; Regularisation</a:t>
             </a:r>
           </a:p>
@@ -8370,6 +8379,9 @@
           <a:lstStyle/>
           <a:p>
             <a:r>
+              <a:rPr>
+                <a:latin typeface="Calibri"/>
+              </a:rPr>
               <a:t>Deeper Networks, Controlled Overfitting</a:t>
             </a:r>
           </a:p>
@@ -8409,6 +8421,9 @@
           <a:lstStyle/>
           <a:p>
             <a:r>
+              <a:rPr b="1">
+                <a:latin typeface="Calibri"/>
+              </a:rPr>
               <a:t>Effect on Validation Loss</a:t>
             </a:r>
           </a:p>
@@ -8472,11 +8487,17 @@
           <a:lstStyle/>
           <a:p>
             <a:r>
+              <a:rPr b="1">
+                <a:latin typeface="Calibri"/>
+              </a:rPr>
               <a:t>Workshop</a:t>
             </a:r>
           </a:p>
           <a:p>
             <a:r>
+              <a:rPr b="1">
+                <a:latin typeface="Calibri"/>
+              </a:rPr>
               <a:t>and Next Steps</a:t>
             </a:r>
           </a:p>
@@ -8498,6 +8519,9 @@
           <a:lstStyle/>
           <a:p>
             <a:r>
+              <a:rPr b="1">
+                <a:latin typeface="Calibri"/>
+              </a:rPr>
               <a:t>04</a:t>
             </a:r>
           </a:p>
@@ -8537,6 +8561,9 @@
           <a:lstStyle/>
           <a:p>
             <a:r>
+              <a:rPr b="1">
+                <a:latin typeface="Calibri"/>
+              </a:rPr>
               <a:t>Workshop: 4 Hands-On Exercises</a:t>
             </a:r>
           </a:p>
@@ -8558,37 +8585,49 @@
           <a:lstStyle/>
           <a:p>
             <a:r>
-              <a:rPr sz="1600"/>
+              <a:rPr sz="1600">
+                <a:latin typeface="Calibri"/>
+              </a:rPr>
               <a:t>Exercise 1:  Deliberately overfit a large network - see the problem</a:t>
             </a:r>
           </a:p>
           <a:p>
             <a:r>
-              <a:rPr sz="1600"/>
+              <a:rPr sz="1600">
+                <a:latin typeface="Calibri"/>
+              </a:rPr>
               <a:t>Exercise 2:  Add Dropout(0.3) - compare val_loss to exercise 1</a:t>
             </a:r>
           </a:p>
           <a:p>
             <a:r>
-              <a:rPr sz="1600"/>
+              <a:rPr sz="1600">
+                <a:latin typeface="Calibri"/>
+              </a:rPr>
               <a:t>Exercise 3:  BatchNormalisation - smoother curves, combine with Dropout</a:t>
             </a:r>
           </a:p>
           <a:p>
             <a:r>
-              <a:rPr sz="1600"/>
+              <a:rPr sz="1600">
+                <a:latin typeface="Calibri"/>
+              </a:rPr>
               <a:t>Exercise 4:  EarlyStopping - patience, restore_best_weights</a:t>
             </a:r>
           </a:p>
           <a:p>
             <a:r>
-              <a:rPr sz="1600"/>
+              <a:rPr sz="1600">
+                <a:latin typeface="Calibri"/>
+              </a:rPr>
               <a:t/>
             </a:r>
           </a:p>
           <a:p>
             <a:r>
-              <a:rPr sz="1600"/>
+              <a:rPr sz="1600">
+                <a:latin typeface="Calibri"/>
+              </a:rPr>
               <a:t>Each exercise isolates one technique to measure its effect</a:t>
             </a:r>
           </a:p>
@@ -8628,37 +8667,49 @@
           <a:lstStyle/>
           <a:p>
             <a:r>
-              <a:rPr sz="1500"/>
+              <a:rPr sz="1500">
+                <a:latin typeface="Calibri"/>
+              </a:rPr>
               <a:t>Deeper networks learn hierarchical patterns but overfit more easily</a:t>
             </a:r>
           </a:p>
           <a:p>
             <a:r>
-              <a:rPr sz="1500"/>
+              <a:rPr sz="1500">
+                <a:latin typeface="Calibri"/>
+              </a:rPr>
               <a:t>Dropout randomly disables neurons - forces redundancy (0.2-0.5)</a:t>
             </a:r>
           </a:p>
           <a:p>
             <a:r>
-              <a:rPr sz="1500"/>
+              <a:rPr sz="1500">
+                <a:latin typeface="Calibri"/>
+              </a:rPr>
               <a:t>BatchNorm stabilises training and acts as mild regularisation</a:t>
             </a:r>
           </a:p>
           <a:p>
             <a:r>
-              <a:rPr sz="1500"/>
+              <a:rPr sz="1500">
+                <a:latin typeface="Calibri"/>
+              </a:rPr>
               <a:t>EarlyStopping is the most practical tool - stop when val_loss plateaus</a:t>
             </a:r>
           </a:p>
           <a:p>
             <a:r>
-              <a:rPr sz="1500"/>
+              <a:rPr sz="1500">
+                <a:latin typeface="Calibri"/>
+              </a:rPr>
               <a:t>Class weights fix imbalanced security data (class_weight='balanced')</a:t>
             </a:r>
           </a:p>
           <a:p>
             <a:r>
-              <a:rPr sz="1500"/>
+              <a:rPr sz="1500">
+                <a:latin typeface="Calibri"/>
+              </a:rPr>
               <a:t>Next: CNNs - networks that understand spatial structure (images, signals)</a:t>
             </a:r>
           </a:p>
@@ -8680,11 +8731,17 @@
           <a:lstStyle/>
           <a:p>
             <a:r>
+              <a:rPr b="1">
+                <a:latin typeface="Calibri"/>
+              </a:rPr>
               <a:t>Key</a:t>
             </a:r>
           </a:p>
           <a:p>
             <a:r>
+              <a:rPr b="1">
+                <a:latin typeface="Calibri"/>
+              </a:rPr>
               <a:t>Takeaways</a:t>
             </a:r>
           </a:p>
@@ -8724,6 +8781,9 @@
           <a:lstStyle/>
           <a:p>
             <a:r>
+              <a:rPr>
+                <a:latin typeface="Calibri"/>
+              </a:rPr>
               <a:t>Next:  Lesson 3.3 - Convolutional Networks</a:t>
             </a:r>
           </a:p>
@@ -8745,6 +8805,9 @@
           <a:lstStyle/>
           <a:p>
             <a:r>
+              <a:rPr b="1">
+                <a:latin typeface="Calibri"/>
+              </a:rPr>
               <a:t>Dropout &amp; Regularisation</a:t>
             </a:r>
           </a:p>
@@ -8784,31 +8847,41 @@
           <a:lstStyle/>
           <a:p>
             <a:r>
-              <a:rPr sz="1600"/>
+              <a:rPr sz="1600">
+                <a:latin typeface="Calibri"/>
+              </a:rPr>
               <a:t>Going deeper - why more layers help (and hurt)</a:t>
             </a:r>
           </a:p>
           <a:p>
             <a:r>
-              <a:rPr sz="1600"/>
+              <a:rPr sz="1600">
+                <a:latin typeface="Calibri"/>
+              </a:rPr>
               <a:t>Dropout - randomly disabling neurons during training</a:t>
             </a:r>
           </a:p>
           <a:p>
             <a:r>
-              <a:rPr sz="1600"/>
+              <a:rPr sz="1600">
+                <a:latin typeface="Calibri"/>
+              </a:rPr>
               <a:t>Batch Normalisation - stabilising deep networks</a:t>
             </a:r>
           </a:p>
           <a:p>
             <a:r>
-              <a:rPr sz="1600"/>
+              <a:rPr sz="1600">
+                <a:latin typeface="Calibri"/>
+              </a:rPr>
               <a:t>Early Stopping - automatic overfitting prevention</a:t>
             </a:r>
           </a:p>
           <a:p>
             <a:r>
-              <a:rPr sz="1600"/>
+              <a:rPr sz="1600">
+                <a:latin typeface="Calibri"/>
+              </a:rPr>
               <a:t>Class weights for imbalanced security data</a:t>
             </a:r>
           </a:p>
@@ -8830,6 +8903,9 @@
           <a:lstStyle/>
           <a:p>
             <a:r>
+              <a:rPr b="1">
+                <a:latin typeface="Calibri"/>
+              </a:rPr>
               <a:t>What We'll Cover</a:t>
             </a:r>
           </a:p>
@@ -8869,6 +8945,9 @@
           <a:lstStyle/>
           <a:p>
             <a:r>
+              <a:rPr b="1">
+                <a:latin typeface="Calibri"/>
+              </a:rPr>
               <a:t>Going Deeper</a:t>
             </a:r>
           </a:p>
@@ -8890,6 +8969,9 @@
           <a:lstStyle/>
           <a:p>
             <a:r>
+              <a:rPr b="1">
+                <a:latin typeface="Calibri"/>
+              </a:rPr>
               <a:t>01</a:t>
             </a:r>
           </a:p>
@@ -8929,6 +9011,9 @@
           <a:lstStyle/>
           <a:p>
             <a:r>
+              <a:rPr>
+                <a:latin typeface="Calibri"/>
+              </a:rPr>
               <a:t/>
             </a:r>
           </a:p>
@@ -8950,31 +9035,41 @@
           <a:lstStyle/>
           <a:p>
             <a:r>
-              <a:rPr sz="1400"/>
+              <a:rPr sz="1400">
+                <a:latin typeface="Calibri"/>
+              </a:rPr>
               <a:t>Deeper networks learn</a:t>
             </a:r>
           </a:p>
           <a:p>
             <a:r>
-              <a:rPr sz="1400"/>
+              <a:rPr sz="1400">
+                <a:latin typeface="Calibri"/>
+              </a:rPr>
               <a:t>hierarchical patterns.</a:t>
             </a:r>
           </a:p>
           <a:p>
             <a:r>
-              <a:rPr sz="1400"/>
+              <a:rPr sz="1400">
+                <a:latin typeface="Calibri"/>
+              </a:rPr>
               <a:t/>
             </a:r>
           </a:p>
           <a:p>
             <a:r>
-              <a:rPr sz="1400"/>
+              <a:rPr sz="1400">
+                <a:latin typeface="Calibri"/>
+              </a:rPr>
               <a:t>But they need regularisation</a:t>
             </a:r>
           </a:p>
           <a:p>
             <a:r>
-              <a:rPr sz="1400"/>
+              <a:rPr sz="1400">
+                <a:latin typeface="Calibri"/>
+              </a:rPr>
               <a:t>to prevent memorisation.</a:t>
             </a:r>
           </a:p>
@@ -8996,6 +9091,9 @@
           <a:lstStyle/>
           <a:p>
             <a:r>
+              <a:rPr b="1">
+                <a:latin typeface="Calibri"/>
+              </a:rPr>
               <a:t>Why Depth Matters</a:t>
             </a:r>
           </a:p>
@@ -9017,67 +9115,89 @@
           <a:lstStyle/>
           <a:p>
             <a:r>
-              <a:rPr sz="1400"/>
+              <a:rPr sz="1400">
+                <a:latin typeface="Calibri"/>
+              </a:rPr>
               <a:t>Layer 1: low-level features</a:t>
             </a:r>
           </a:p>
           <a:p>
             <a:r>
-              <a:rPr sz="1400"/>
+              <a:rPr sz="1400">
+                <a:latin typeface="Calibri"/>
+              </a:rPr>
               <a:t>  (e.g. high packet rate)</a:t>
             </a:r>
           </a:p>
           <a:p>
             <a:r>
-              <a:rPr sz="1400"/>
+              <a:rPr sz="1400">
+                <a:latin typeface="Calibri"/>
+              </a:rPr>
               <a:t/>
             </a:r>
           </a:p>
           <a:p>
             <a:r>
-              <a:rPr sz="1400"/>
+              <a:rPr sz="1400">
+                <a:latin typeface="Calibri"/>
+              </a:rPr>
               <a:t>Layer 2: combinations</a:t>
             </a:r>
           </a:p>
           <a:p>
             <a:r>
-              <a:rPr sz="1400"/>
+              <a:rPr sz="1400">
+                <a:latin typeface="Calibri"/>
+              </a:rPr>
               <a:t>  (high rate + specific port = scan)</a:t>
             </a:r>
           </a:p>
           <a:p>
             <a:r>
-              <a:rPr sz="1400"/>
+              <a:rPr sz="1400">
+                <a:latin typeface="Calibri"/>
+              </a:rPr>
               <a:t/>
             </a:r>
           </a:p>
           <a:p>
             <a:r>
-              <a:rPr sz="1400"/>
+              <a:rPr sz="1400">
+                <a:latin typeface="Calibri"/>
+              </a:rPr>
               <a:t>Layer 3: context</a:t>
             </a:r>
           </a:p>
           <a:p>
             <a:r>
-              <a:rPr sz="1400"/>
+              <a:rPr sz="1400">
+                <a:latin typeface="Calibri"/>
+              </a:rPr>
               <a:t>  (that combo + long duration = APT)</a:t>
             </a:r>
           </a:p>
           <a:p>
             <a:r>
-              <a:rPr sz="1400"/>
+              <a:rPr sz="1400">
+                <a:latin typeface="Calibri"/>
+              </a:rPr>
               <a:t/>
             </a:r>
           </a:p>
           <a:p>
             <a:r>
-              <a:rPr sz="1400"/>
+              <a:rPr sz="1400">
+                <a:latin typeface="Calibri"/>
+              </a:rPr>
               <a:t>But deeper = more parameters</a:t>
             </a:r>
           </a:p>
           <a:p>
             <a:r>
-              <a:rPr sz="1400"/>
+              <a:rPr sz="1400">
+                <a:latin typeface="Calibri"/>
+              </a:rPr>
               <a:t>  = more risk of overfitting</a:t>
             </a:r>
           </a:p>
@@ -9117,6 +9237,9 @@
           <a:lstStyle/>
           <a:p>
             <a:r>
+              <a:rPr b="1">
+                <a:latin typeface="Calibri"/>
+              </a:rPr>
               <a:t>Dropout</a:t>
             </a:r>
           </a:p>
@@ -9138,6 +9261,9 @@
           <a:lstStyle/>
           <a:p>
             <a:r>
+              <a:rPr b="1">
+                <a:latin typeface="Calibri"/>
+              </a:rPr>
               <a:t>02</a:t>
             </a:r>
           </a:p>
@@ -9177,6 +9303,9 @@
           <a:lstStyle/>
           <a:p>
             <a:r>
+              <a:rPr b="1">
+                <a:latin typeface="Calibri"/>
+              </a:rPr>
               <a:t>Dropout: Randomly Disable Neurons During Training</a:t>
             </a:r>
           </a:p>
@@ -9240,6 +9369,9 @@
           <a:lstStyle/>
           <a:p>
             <a:r>
+              <a:rPr b="1">
+                <a:latin typeface="Calibri"/>
+              </a:rPr>
               <a:t>How Dropout Works</a:t>
             </a:r>
           </a:p>
@@ -9261,61 +9393,81 @@
           <a:lstStyle/>
           <a:p>
             <a:r>
-              <a:rPr sz="1500"/>
+              <a:rPr sz="1500">
+                <a:latin typeface="Calibri"/>
+              </a:rPr>
               <a:t>keras.layers.Dropout(0.3)   # zero 30% of neurons each step</a:t>
             </a:r>
           </a:p>
           <a:p>
             <a:r>
-              <a:rPr sz="1500"/>
+              <a:rPr sz="1500">
+                <a:latin typeface="Calibri"/>
+              </a:rPr>
               <a:t/>
             </a:r>
           </a:p>
           <a:p>
             <a:r>
-              <a:rPr sz="1500"/>
+              <a:rPr sz="1500">
+                <a:latin typeface="Calibri"/>
+              </a:rPr>
               <a:t>Applied only during training - not during inference</a:t>
             </a:r>
           </a:p>
           <a:p>
             <a:r>
-              <a:rPr sz="1500"/>
+              <a:rPr sz="1500">
+                <a:latin typeface="Calibri"/>
+              </a:rPr>
               <a:t>Typical values: 0.2 - 0.5</a:t>
             </a:r>
           </a:p>
           <a:p>
             <a:r>
-              <a:rPr sz="1500"/>
+              <a:rPr sz="1500">
+                <a:latin typeface="Calibri"/>
+              </a:rPr>
               <a:t/>
             </a:r>
           </a:p>
           <a:p>
             <a:r>
-              <a:rPr sz="1500"/>
+              <a:rPr sz="1500">
+                <a:latin typeface="Calibri"/>
+              </a:rPr>
               <a:t>Analogy: like training a sports team where random</a:t>
             </a:r>
           </a:p>
           <a:p>
             <a:r>
-              <a:rPr sz="1500"/>
+              <a:rPr sz="1500">
+                <a:latin typeface="Calibri"/>
+              </a:rPr>
               <a:t>players sit out each practice - everyone learns every position</a:t>
             </a:r>
           </a:p>
           <a:p>
             <a:r>
-              <a:rPr sz="1500"/>
+              <a:rPr sz="1500">
+                <a:latin typeface="Calibri"/>
+              </a:rPr>
               <a:t/>
             </a:r>
           </a:p>
           <a:p>
             <a:r>
-              <a:rPr sz="1500"/>
+              <a:rPr sz="1500">
+                <a:latin typeface="Calibri"/>
+              </a:rPr>
               <a:t>Effect: forces the network to build redundant representations</a:t>
             </a:r>
           </a:p>
           <a:p>
             <a:r>
-              <a:rPr sz="1500"/>
+              <a:rPr sz="1500">
+                <a:latin typeface="Calibri"/>
+              </a:rPr>
               <a:t>  No single neuron can become a bottleneck</a:t>
             </a:r>
           </a:p>
@@ -9355,11 +9507,17 @@
           <a:lstStyle/>
           <a:p>
             <a:r>
+              <a:rPr b="1">
+                <a:latin typeface="Calibri"/>
+              </a:rPr>
               <a:t>All Four</a:t>
             </a:r>
           </a:p>
           <a:p>
             <a:r>
+              <a:rPr b="1">
+                <a:latin typeface="Calibri"/>
+              </a:rPr>
               <a:t>Techniques</a:t>
             </a:r>
           </a:p>
@@ -9381,6 +9539,9 @@
           <a:lstStyle/>
           <a:p>
             <a:r>
+              <a:rPr b="1">
+                <a:latin typeface="Calibri"/>
+              </a:rPr>
               <a:t>03</a:t>
             </a:r>
           </a:p>
@@ -9420,6 +9581,9 @@
           <a:lstStyle/>
           <a:p>
             <a:r>
+              <a:rPr b="1">
+                <a:latin typeface="Calibri"/>
+              </a:rPr>
               <a:t>The Regularisation Toolkit for Neural Networks</a:t>
             </a:r>
           </a:p>
